--- a/relatorios/maximize/pptx/guarana-tuchaua-setembro-2026.pptx
+++ b/relatorios/maximize/pptx/guarana-tuchaua-setembro-2026.pptx
@@ -10060,24 +10060,20 @@
         <p:spPr>
           <a:xfrm>
             <a:off x="771525" y="1828800"/>
-            <a:ext cx="10968418" cy="831056"/>
-          </a:xfrm>
-          <a:prstGeom prst="rect">
-            <a:avLst/>
-          </a:prstGeom>
-          <a:noFill/>
-        </p:spPr>
-        <p:txBody>
-          <a:bodyPr wrap="square" lIns="0" rIns="0" tIns="0" bIns="0" anchor="t">
-            <a:noAutofit/>
-          </a:bodyPr>
-          <a:lstStyle/>
-          <a:p>
-            <a:pPr algn="l">
-              <a:lnSpc>
-                <a:spcPts val="1406"/>
-              </a:lnSpc>
-            </a:pPr>
+            <a:ext cx="1362968" cy="142875"/>
+          </a:xfrm>
+          <a:prstGeom prst="rect">
+            <a:avLst/>
+          </a:prstGeom>
+          <a:noFill/>
+        </p:spPr>
+        <p:txBody>
+          <a:bodyPr wrap="none" lIns="0" rIns="0" tIns="0" bIns="0" anchor="t">
+            <a:noAutofit/>
+          </a:bodyPr>
+          <a:lstStyle/>
+          <a:p>
+            <a:pPr algn="l"/>
             <a:r>
               <a:rPr sz="950" b="1" i="0">
                 <a:solidFill>
@@ -10087,6 +10083,32 @@
               </a:rPr>
               <a:t>Alcance e Interações:</a:t>
             </a:r>
+          </a:p>
+        </p:txBody>
+      </p:sp>
+      <p:sp>
+        <p:nvSpPr>
+          <p:cNvPr id="9" name="TextBox 8"/>
+          <p:cNvSpPr txBox="1"/>
+          <p:nvPr/>
+        </p:nvSpPr>
+        <p:spPr>
+          <a:xfrm>
+            <a:off x="771525" y="2516981"/>
+            <a:ext cx="1773734" cy="142875"/>
+          </a:xfrm>
+          <a:prstGeom prst="rect">
+            <a:avLst/>
+          </a:prstGeom>
+          <a:noFill/>
+        </p:spPr>
+        <p:txBody>
+          <a:bodyPr wrap="none" lIns="0" rIns="0" tIns="0" bIns="0" anchor="t">
+            <a:noAutofit/>
+          </a:bodyPr>
+          <a:lstStyle/>
+          <a:p>
+            <a:pPr algn="l"/>
             <a:r>
               <a:rPr sz="950" b="1" i="0">
                 <a:solidFill>
@@ -10101,7 +10123,7 @@
       </p:sp>
       <p:sp>
         <p:nvSpPr>
-          <p:cNvPr id="9" name="TextBox 8"/>
+          <p:cNvPr id="10" name="TextBox 9"/>
           <p:cNvSpPr txBox="1"/>
           <p:nvPr/>
         </p:nvSpPr>
@@ -10154,7 +10176,7 @@
       </p:sp>
       <p:sp>
         <p:nvSpPr>
-          <p:cNvPr id="10" name="TextBox 9"/>
+          <p:cNvPr id="11" name="TextBox 10"/>
           <p:cNvSpPr txBox="1"/>
           <p:nvPr/>
         </p:nvSpPr>
@@ -10207,7 +10229,7 @@
       </p:sp>
       <p:sp>
         <p:nvSpPr>
-          <p:cNvPr id="11" name="TextBox 10"/>
+          <p:cNvPr id="12" name="TextBox 11"/>
           <p:cNvSpPr txBox="1"/>
           <p:nvPr/>
         </p:nvSpPr>
@@ -10260,7 +10282,7 @@
       </p:sp>
       <p:sp>
         <p:nvSpPr>
-          <p:cNvPr id="12" name="TextBox 11"/>
+          <p:cNvPr id="13" name="TextBox 12"/>
           <p:cNvSpPr txBox="1"/>
           <p:nvPr/>
         </p:nvSpPr>
@@ -10313,7 +10335,7 @@
       </p:sp>
       <p:sp>
         <p:nvSpPr>
-          <p:cNvPr id="13" name="TextBox 12"/>
+          <p:cNvPr id="14" name="TextBox 13"/>
           <p:cNvSpPr txBox="1"/>
           <p:nvPr/>
         </p:nvSpPr>
@@ -10348,7 +10370,7 @@
       </p:sp>
       <p:sp>
         <p:nvSpPr>
-          <p:cNvPr id="14" name="TextBox 13"/>
+          <p:cNvPr id="15" name="TextBox 14"/>
           <p:cNvSpPr txBox="1"/>
           <p:nvPr/>
         </p:nvSpPr>
@@ -10392,7 +10414,7 @@
       </p:sp>
       <p:sp>
         <p:nvSpPr>
-          <p:cNvPr id="15" name="TextBox 14"/>
+          <p:cNvPr id="16" name="TextBox 15"/>
           <p:cNvSpPr txBox="1"/>
           <p:nvPr/>
         </p:nvSpPr>
@@ -10436,7 +10458,7 @@
       </p:sp>
       <p:sp>
         <p:nvSpPr>
-          <p:cNvPr id="16" name="TextBox 15"/>
+          <p:cNvPr id="17" name="TextBox 16"/>
           <p:cNvSpPr txBox="1"/>
           <p:nvPr/>
         </p:nvSpPr>
@@ -10480,7 +10502,7 @@
       </p:sp>
       <p:sp>
         <p:nvSpPr>
-          <p:cNvPr id="17" name="TextBox 16"/>
+          <p:cNvPr id="18" name="TextBox 17"/>
           <p:cNvSpPr txBox="1"/>
           <p:nvPr/>
         </p:nvSpPr>
